--- a/assets/files/chakugan.pptx
+++ b/assets/files/chakugan.pptx
@@ -4481,7 +4481,7 @@
                           <a:latin typeface="UD デジタル 教科書体 NP-B" panose="02020700000000000000" pitchFamily="18" charset="-128"/>
                           <a:ea typeface="UD デジタル 教科書体 NP-B" panose="02020700000000000000" pitchFamily="18" charset="-128"/>
                         </a:rPr>
-                        <a:t>根拠を基に「空気は、あたためると体積が大きくなり、冷やすと小さくなる」という妥当な結論を導き出し、表現している。</a:t>
+                        <a:t>根拠を基に「空気は、あたためると体積が大きくなり、冷やすと小さくなる」という妥当な結論を導きだし、表現している。</a:t>
                       </a:r>
                     </a:p>
                   </a:txBody>
@@ -4543,7 +4543,7 @@
                           <a:latin typeface="UD デジタル 教科書体 NP-B" panose="02020700000000000000" pitchFamily="18" charset="-128"/>
                           <a:ea typeface="UD デジタル 教科書体 NP-B" panose="02020700000000000000" pitchFamily="18" charset="-128"/>
                         </a:rPr>
-                        <a:t>空気の結論を基に身の回りの物を分類し、空気や水のような形のない物と、金属や木のような形のある物とを比べて、次に調べる物を決めている。</a:t>
+                        <a:t>空気について導きだした結論を基に身の回りの物を分類し、空気や水のような形のない物と、金属や木のような形のある物とを比べて、次に調べる物を決めている。</a:t>
                       </a:r>
                     </a:p>
                   </a:txBody>
@@ -5204,7 +5204,7 @@
                           <a:latin typeface="UD デジタル 教科書体 NP-B" panose="02020700000000000000" pitchFamily="18" charset="-128"/>
                           <a:ea typeface="UD デジタル 教科書体 NP-B" panose="02020700000000000000" pitchFamily="18" charset="-128"/>
                         </a:rPr>
-                        <a:t>空気の結論と分類表とを関係付け、「水も、あたためたり冷やしたりすると、体積は変わるのだろうか」という問題を見いだす。</a:t>
+                        <a:t>空気について導きだした結論と分類表とを関係付け、「水も、あたためたり冷やしたりすると、体積は変わるのだろうか」という問題を見いだす。</a:t>
                       </a:r>
                     </a:p>
                   </a:txBody>
@@ -5410,7 +5410,7 @@
                           <a:latin typeface="UD デジタル 教科書体 NP-B" panose="02020700000000000000" pitchFamily="18" charset="-128"/>
                           <a:ea typeface="UD デジタル 教科書体 NP-B" panose="02020700000000000000" pitchFamily="18" charset="-128"/>
                         </a:rPr>
-                        <a:t>根拠を基に「水も温度で体積が変わるが、増え方は空気より小さい」という妥当な結論を導き出し、表現している。</a:t>
+                        <a:t>根拠を基に「水も温度で体積が変わるが、増え方は空気より小さい」という妥当な結論を導きだし、表現している。</a:t>
                       </a:r>
                     </a:p>
                   </a:txBody>
@@ -5472,7 +5472,7 @@
                           <a:latin typeface="UD デジタル 教科書体 NP-B" panose="02020700000000000000" pitchFamily="18" charset="-128"/>
                           <a:ea typeface="UD デジタル 教科書体 NP-B" panose="02020700000000000000" pitchFamily="18" charset="-128"/>
                         </a:rPr>
-                        <a:t>空気と水の結論を関係付け、「形のある金ぞくも、あたためると体積が変わるのか」という新たな問いをもち、次の追究に向かおうとしている。</a:t>
+                        <a:t>空気と水について導きだした結論を関係付け、「形のある金ぞくも、あたためると体積が変わるのか」という新たな問いをもち、次の追究に向かおうとしている。</a:t>
                       </a:r>
                     </a:p>
                   </a:txBody>
@@ -6335,7 +6335,7 @@
                           <a:latin typeface="UD デジタル 教科書体 NP-B" panose="02020700000000000000" pitchFamily="18" charset="-128"/>
                           <a:ea typeface="UD デジタル 教科書体 NP-B" panose="02020700000000000000" pitchFamily="18" charset="-128"/>
                         </a:rPr>
-                        <a:t>空気と水の結論や分類表と関係付け、「金ぞくは、あたためたり冷やしたりすると、体積は変わるのだろうか」という問題を見いだす。</a:t>
+                        <a:t>空気と水について導きだした結論や分類表と関係付け、「金ぞくは、あたためたり冷やしたりすると、体積は変わるのだろうか」という問題を見いだす。</a:t>
                       </a:r>
                     </a:p>
                   </a:txBody>
@@ -6409,7 +6409,7 @@
                           <a:latin typeface="UD デジタル 教科書体 NP-B" panose="02020700000000000000" pitchFamily="18" charset="-128"/>
                           <a:ea typeface="UD デジタル 教科書体 NP-B" panose="02020700000000000000" pitchFamily="18" charset="-128"/>
                         </a:rPr>
-                        <a:t>空気や水の結論や生活経験と関係付けて根拠のある予想を発想し、「大きくなるなら、あたためた玉は輪を通らなくなるはず」と結果を見通して、空気や水と同じ方法で調べる計画を立てている。</a:t>
+                        <a:t>空気や水について導きだした結論や生活経験と関係付けて根拠のある予想を発想し、「大きくなるなら、あたためた玉は輪を通らなくなるはず」と結果を見通して、空気や水と同じ方法で調べる計画を立てている。</a:t>
                       </a:r>
                     </a:p>
                   </a:txBody>
@@ -6553,7 +6553,7 @@
                           <a:latin typeface="UD デジタル 教科書体 NP-B" panose="02020700000000000000" pitchFamily="18" charset="-128"/>
                           <a:ea typeface="UD デジタル 教科書体 NP-B" panose="02020700000000000000" pitchFamily="18" charset="-128"/>
                         </a:rPr>
-                        <a:t>根拠を基に「金ぞくも、あたためると体積が大きくなり、冷やすと小さくなる」という妥当な結論を導き出し、表現している。</a:t>
+                        <a:t>根拠を基に「金ぞくも、あたためると体積が大きくなり、冷やすと小さくなる」という妥当な結論を導きだし、表現している。</a:t>
                       </a:r>
                     </a:p>
                   </a:txBody>
